--- a/~sasano/lecture/proglang/26/proglang5Ans.pptx
+++ b/~sasano/lecture/proglang/26/proglang5Ans.pptx
@@ -217,7 +217,7 @@
             <a:fld id="{2A1D0DAA-63F4-43D0-882A-891F9A495018}" type="datetimeFigureOut">
               <a:rPr kumimoji="1" lang="ja-JP" altLang="en-US" smtClean="0"/>
               <a:pPr/>
-              <a:t>2019/12/2</a:t>
+              <a:t>2026/9/28</a:t>
             </a:fld>
             <a:endParaRPr kumimoji="1" lang="ja-JP" altLang="en-US"/>
           </a:p>
@@ -1467,7 +1467,7 @@
             <a:fld id="{E90ED720-0104-4369-84BC-D37694168613}" type="datetimeFigureOut">
               <a:rPr kumimoji="1" lang="ja-JP" altLang="en-US" smtClean="0"/>
               <a:pPr/>
-              <a:t>2019/12/2</a:t>
+              <a:t>2026/9/28</a:t>
             </a:fld>
             <a:endParaRPr kumimoji="1" lang="ja-JP" altLang="en-US"/>
           </a:p>
@@ -1664,7 +1664,7 @@
             <a:fld id="{E90ED720-0104-4369-84BC-D37694168613}" type="datetimeFigureOut">
               <a:rPr kumimoji="1" lang="ja-JP" altLang="en-US" smtClean="0"/>
               <a:pPr/>
-              <a:t>2019/12/2</a:t>
+              <a:t>2026/9/28</a:t>
             </a:fld>
             <a:endParaRPr kumimoji="1" lang="ja-JP" altLang="en-US"/>
           </a:p>
@@ -1871,7 +1871,7 @@
             <a:fld id="{E90ED720-0104-4369-84BC-D37694168613}" type="datetimeFigureOut">
               <a:rPr kumimoji="1" lang="ja-JP" altLang="en-US" smtClean="0"/>
               <a:pPr/>
-              <a:t>2019/12/2</a:t>
+              <a:t>2026/9/28</a:t>
             </a:fld>
             <a:endParaRPr kumimoji="1" lang="ja-JP" altLang="en-US"/>
           </a:p>
@@ -2068,7 +2068,7 @@
             <a:fld id="{E90ED720-0104-4369-84BC-D37694168613}" type="datetimeFigureOut">
               <a:rPr kumimoji="1" lang="ja-JP" altLang="en-US" smtClean="0"/>
               <a:pPr/>
-              <a:t>2019/12/2</a:t>
+              <a:t>2026/9/28</a:t>
             </a:fld>
             <a:endParaRPr kumimoji="1" lang="ja-JP" altLang="en-US"/>
           </a:p>
@@ -2310,7 +2310,7 @@
             <a:fld id="{E90ED720-0104-4369-84BC-D37694168613}" type="datetimeFigureOut">
               <a:rPr kumimoji="1" lang="ja-JP" altLang="en-US" smtClean="0"/>
               <a:pPr/>
-              <a:t>2019/12/2</a:t>
+              <a:t>2026/9/28</a:t>
             </a:fld>
             <a:endParaRPr kumimoji="1" lang="ja-JP" altLang="en-US"/>
           </a:p>
@@ -2656,7 +2656,7 @@
             <a:fld id="{E90ED720-0104-4369-84BC-D37694168613}" type="datetimeFigureOut">
               <a:rPr kumimoji="1" lang="ja-JP" altLang="en-US" smtClean="0"/>
               <a:pPr/>
-              <a:t>2019/12/2</a:t>
+              <a:t>2026/9/28</a:t>
             </a:fld>
             <a:endParaRPr kumimoji="1" lang="ja-JP" altLang="en-US"/>
           </a:p>
@@ -3136,7 +3136,7 @@
             <a:fld id="{E90ED720-0104-4369-84BC-D37694168613}" type="datetimeFigureOut">
               <a:rPr kumimoji="1" lang="ja-JP" altLang="en-US" smtClean="0"/>
               <a:pPr/>
-              <a:t>2019/12/2</a:t>
+              <a:t>2026/9/28</a:t>
             </a:fld>
             <a:endParaRPr kumimoji="1" lang="ja-JP" altLang="en-US"/>
           </a:p>
@@ -3250,7 +3250,7 @@
             <a:fld id="{E90ED720-0104-4369-84BC-D37694168613}" type="datetimeFigureOut">
               <a:rPr kumimoji="1" lang="ja-JP" altLang="en-US" smtClean="0"/>
               <a:pPr/>
-              <a:t>2019/12/2</a:t>
+              <a:t>2026/9/28</a:t>
             </a:fld>
             <a:endParaRPr kumimoji="1" lang="ja-JP" altLang="en-US"/>
           </a:p>
@@ -3342,7 +3342,7 @@
             <a:fld id="{E90ED720-0104-4369-84BC-D37694168613}" type="datetimeFigureOut">
               <a:rPr kumimoji="1" lang="ja-JP" altLang="en-US" smtClean="0"/>
               <a:pPr/>
-              <a:t>2019/12/2</a:t>
+              <a:t>2026/9/28</a:t>
             </a:fld>
             <a:endParaRPr kumimoji="1" lang="ja-JP" altLang="en-US"/>
           </a:p>
@@ -3646,7 +3646,7 @@
             <a:fld id="{E90ED720-0104-4369-84BC-D37694168613}" type="datetimeFigureOut">
               <a:rPr kumimoji="1" lang="ja-JP" altLang="en-US" smtClean="0"/>
               <a:pPr/>
-              <a:t>2019/12/2</a:t>
+              <a:t>2026/9/28</a:t>
             </a:fld>
             <a:endParaRPr kumimoji="1" lang="ja-JP" altLang="en-US"/>
           </a:p>
@@ -3895,7 +3895,7 @@
             <a:fld id="{E90ED720-0104-4369-84BC-D37694168613}" type="datetimeFigureOut">
               <a:rPr kumimoji="1" lang="ja-JP" altLang="en-US" smtClean="0"/>
               <a:pPr/>
-              <a:t>2019/12/2</a:t>
+              <a:t>2026/9/28</a:t>
             </a:fld>
             <a:endParaRPr kumimoji="1" lang="ja-JP" altLang="en-US"/>
           </a:p>
@@ -4135,7 +4135,7 @@
             <a:fld id="{E90ED720-0104-4369-84BC-D37694168613}" type="datetimeFigureOut">
               <a:rPr kumimoji="1" lang="ja-JP" altLang="en-US" smtClean="0"/>
               <a:pPr/>
-              <a:t>2019/12/2</a:t>
+              <a:t>2026/9/28</a:t>
             </a:fld>
             <a:endParaRPr kumimoji="1" lang="ja-JP" altLang="en-US"/>
           </a:p>
@@ -4581,8 +4581,8 @@
         </p:nvSpPr>
         <p:spPr>
           <a:xfrm>
-            <a:off x="2680132" y="5120358"/>
-            <a:ext cx="3534942" cy="523220"/>
+            <a:off x="3714477" y="5099338"/>
+            <a:ext cx="1500732" cy="523220"/>
           </a:xfrm>
           <a:prstGeom prst="rect">
             <a:avLst/>
@@ -4595,9 +4595,14 @@
           </a:bodyPr>
           <a:lstStyle/>
           <a:p>
+            <a:pPr algn="ctr"/>
+            <a:r>
+              <a:rPr kumimoji="1" lang="ja-JP" altLang="en-US" sz="2800"/>
+              <a:t>篠埜　</a:t>
+            </a:r>
             <a:r>
               <a:rPr kumimoji="1" lang="ja-JP" altLang="en-US" sz="2800" dirty="0"/>
-              <a:t>情報工学科　篠埜　功</a:t>
+              <a:t>功</a:t>
             </a:r>
           </a:p>
         </p:txBody>
